--- a/资料/视频/AI雕兄口播稿/AI雕兄-演讲稿.pptx
+++ b/资料/视频/AI雕兄口播稿/AI雕兄-演讲稿.pptx
@@ -1346,12 +1346,12 @@
           <a:p/>
           <a:p>
             <a:r>
-              <a:t>9.9试用，先做账号诊断。</a:t>
-            </a:r>
-          </a:p>
-          <a:p>
-            <a:r>
-              <a:t>方向对不对，先诊断了才知道。</a:t>
+              <a:t>联系我免费做个测评。</a:t>
+            </a:r>
+          </a:p>
+          <a:p>
+            <a:r>
+              <a:t>方向对不对，做一次就知道。</a:t>
             </a:r>
           </a:p>
           <a:p>
@@ -6321,7 +6321,7 @@
                 </a:solidFill>
                 <a:latin typeface="微软雅黑"/>
               </a:rPr>
-              <a:t>9.9 试用 —— 先做账号诊断</a:t>
+              <a:t>联系我免费做个测评</a:t>
             </a:r>
           </a:p>
           <a:p>
@@ -6340,7 +6340,7 @@
                 </a:solidFill>
                 <a:latin typeface="微软雅黑"/>
               </a:rPr>
-              <a:t>方向对不对，先诊断了才知道 · 不合适，不勉强</a:t>
+              <a:t>方向对不对，做一次就知道 · 不合适，不勉强</a:t>
             </a:r>
           </a:p>
         </p:txBody>
